--- a/report/AdaCFAR_Presentation_v2.pptx
+++ b/report/AdaCFAR_Presentation_v2.pptx
@@ -4,6 +4,9 @@
   <p:sldMasterIdLst>
     <p:sldMasterId id="2147483648" r:id="rId1"/>
   </p:sldMasterIdLst>
+  <p:notesMasterIdLst>
+    <p:notesMasterId r:id="rId17"/>
+  </p:notesMasterIdLst>
   <p:sldIdLst>
     <p:sldId id="256" r:id="rId2"/>
     <p:sldId id="257" r:id="rId3"/>
@@ -366,6 +369,440 @@
 </c:chartSpace>
 </file>
 
+<file path=ppt/notesMasters/notesMaster1.xml><?xml version="1.0" encoding="utf-8"?>
+<p:notesMaster xmlns:a="http://schemas.openxmlformats.org/drawingml/2006/main" xmlns:r="http://schemas.openxmlformats.org/officeDocument/2006/relationships" xmlns:p="http://schemas.openxmlformats.org/presentationml/2006/main">
+  <p:cSld>
+    <p:bg>
+      <p:bgRef idx="1001">
+        <a:schemeClr val="bg1"/>
+      </p:bgRef>
+    </p:bg>
+    <p:spTree>
+      <p:nvGrpSpPr>
+        <p:cNvPr id="1" name=""/>
+        <p:cNvGrpSpPr/>
+        <p:nvPr/>
+      </p:nvGrpSpPr>
+      <p:grpSpPr>
+        <a:xfrm>
+          <a:off x="0" y="0"/>
+          <a:ext cx="0" cy="0"/>
+          <a:chOff x="0" y="0"/>
+          <a:chExt cx="0" cy="0"/>
+        </a:xfrm>
+      </p:grpSpPr>
+      <p:sp>
+        <p:nvSpPr>
+          <p:cNvPr id="2" name="Header Placeholder 1"/>
+          <p:cNvSpPr>
+            <a:spLocks noGrp="1"/>
+          </p:cNvSpPr>
+          <p:nvPr>
+            <p:ph type="hdr" sz="quarter"/>
+          </p:nvPr>
+        </p:nvSpPr>
+        <p:spPr>
+          <a:xfrm>
+            <a:off x="0" y="0"/>
+            <a:ext cx="2971800" cy="458788"/>
+          </a:xfrm>
+          <a:prstGeom prst="rect">
+            <a:avLst/>
+          </a:prstGeom>
+        </p:spPr>
+        <p:txBody>
+          <a:bodyPr vert="horz" lIns="91440" tIns="45720" rIns="91440" bIns="45720" rtlCol="0"/>
+          <a:lstStyle>
+            <a:lvl1pPr algn="l">
+              <a:defRPr sz="1200"/>
+            </a:lvl1pPr>
+          </a:lstStyle>
+          <a:p>
+            <a:endParaRPr lang="en-IL"/>
+          </a:p>
+        </p:txBody>
+      </p:sp>
+      <p:sp>
+        <p:nvSpPr>
+          <p:cNvPr id="3" name="Date Placeholder 2"/>
+          <p:cNvSpPr>
+            <a:spLocks noGrp="1"/>
+          </p:cNvSpPr>
+          <p:nvPr>
+            <p:ph type="dt" idx="1"/>
+          </p:nvPr>
+        </p:nvSpPr>
+        <p:spPr>
+          <a:xfrm>
+            <a:off x="3884613" y="0"/>
+            <a:ext cx="2971800" cy="458788"/>
+          </a:xfrm>
+          <a:prstGeom prst="rect">
+            <a:avLst/>
+          </a:prstGeom>
+        </p:spPr>
+        <p:txBody>
+          <a:bodyPr vert="horz" lIns="91440" tIns="45720" rIns="91440" bIns="45720" rtlCol="0"/>
+          <a:lstStyle>
+            <a:lvl1pPr algn="r">
+              <a:defRPr sz="1200"/>
+            </a:lvl1pPr>
+          </a:lstStyle>
+          <a:p>
+            <a:fld id="{E0EBC895-E670-094B-ADAF-986F9107EC27}" type="datetimeFigureOut">
+              <a:rPr lang="en-IL" smtClean="0"/>
+              <a:t>16/06/2026</a:t>
+            </a:fld>
+            <a:endParaRPr lang="en-IL"/>
+          </a:p>
+        </p:txBody>
+      </p:sp>
+      <p:sp>
+        <p:nvSpPr>
+          <p:cNvPr id="4" name="Slide Image Placeholder 3"/>
+          <p:cNvSpPr>
+            <a:spLocks noGrp="1" noRot="1" noChangeAspect="1"/>
+          </p:cNvSpPr>
+          <p:nvPr>
+            <p:ph type="sldImg" idx="2"/>
+          </p:nvPr>
+        </p:nvSpPr>
+        <p:spPr>
+          <a:xfrm>
+            <a:off x="685800" y="1143000"/>
+            <a:ext cx="5486400" cy="3086100"/>
+          </a:xfrm>
+          <a:prstGeom prst="rect">
+            <a:avLst/>
+          </a:prstGeom>
+          <a:noFill/>
+          <a:ln w="12700">
+            <a:solidFill>
+              <a:prstClr val="black"/>
+            </a:solidFill>
+          </a:ln>
+        </p:spPr>
+        <p:txBody>
+          <a:bodyPr vert="horz" lIns="91440" tIns="45720" rIns="91440" bIns="45720" rtlCol="0" anchor="ctr"/>
+          <a:lstStyle/>
+          <a:p>
+            <a:endParaRPr lang="en-IL"/>
+          </a:p>
+        </p:txBody>
+      </p:sp>
+      <p:sp>
+        <p:nvSpPr>
+          <p:cNvPr id="5" name="Notes Placeholder 4"/>
+          <p:cNvSpPr>
+            <a:spLocks noGrp="1"/>
+          </p:cNvSpPr>
+          <p:nvPr>
+            <p:ph type="body" sz="quarter" idx="3"/>
+          </p:nvPr>
+        </p:nvSpPr>
+        <p:spPr>
+          <a:xfrm>
+            <a:off x="685800" y="4400550"/>
+            <a:ext cx="5486400" cy="3600450"/>
+          </a:xfrm>
+          <a:prstGeom prst="rect">
+            <a:avLst/>
+          </a:prstGeom>
+        </p:spPr>
+        <p:txBody>
+          <a:bodyPr vert="horz" lIns="91440" tIns="45720" rIns="91440" bIns="45720" rtlCol="0"/>
+          <a:lstStyle/>
+          <a:p>
+            <a:pPr lvl="0"/>
+            <a:r>
+              <a:rPr lang="en-US"/>
+              <a:t>Click to edit Master text styles</a:t>
+            </a:r>
+          </a:p>
+          <a:p>
+            <a:pPr lvl="1"/>
+            <a:r>
+              <a:rPr lang="en-US"/>
+              <a:t>Second level</a:t>
+            </a:r>
+          </a:p>
+          <a:p>
+            <a:pPr lvl="2"/>
+            <a:r>
+              <a:rPr lang="en-US"/>
+              <a:t>Third level</a:t>
+            </a:r>
+          </a:p>
+          <a:p>
+            <a:pPr lvl="3"/>
+            <a:r>
+              <a:rPr lang="en-US"/>
+              <a:t>Fourth level</a:t>
+            </a:r>
+          </a:p>
+          <a:p>
+            <a:pPr lvl="4"/>
+            <a:r>
+              <a:rPr lang="en-US"/>
+              <a:t>Fifth level</a:t>
+            </a:r>
+            <a:endParaRPr lang="en-IL"/>
+          </a:p>
+        </p:txBody>
+      </p:sp>
+      <p:sp>
+        <p:nvSpPr>
+          <p:cNvPr id="6" name="Footer Placeholder 5"/>
+          <p:cNvSpPr>
+            <a:spLocks noGrp="1"/>
+          </p:cNvSpPr>
+          <p:nvPr>
+            <p:ph type="ftr" sz="quarter" idx="4"/>
+          </p:nvPr>
+        </p:nvSpPr>
+        <p:spPr>
+          <a:xfrm>
+            <a:off x="0" y="8685213"/>
+            <a:ext cx="2971800" cy="458787"/>
+          </a:xfrm>
+          <a:prstGeom prst="rect">
+            <a:avLst/>
+          </a:prstGeom>
+        </p:spPr>
+        <p:txBody>
+          <a:bodyPr vert="horz" lIns="91440" tIns="45720" rIns="91440" bIns="45720" rtlCol="0" anchor="b"/>
+          <a:lstStyle>
+            <a:lvl1pPr algn="l">
+              <a:defRPr sz="1200"/>
+            </a:lvl1pPr>
+          </a:lstStyle>
+          <a:p>
+            <a:endParaRPr lang="en-IL"/>
+          </a:p>
+        </p:txBody>
+      </p:sp>
+      <p:sp>
+        <p:nvSpPr>
+          <p:cNvPr id="7" name="Slide Number Placeholder 6"/>
+          <p:cNvSpPr>
+            <a:spLocks noGrp="1"/>
+          </p:cNvSpPr>
+          <p:nvPr>
+            <p:ph type="sldNum" sz="quarter" idx="5"/>
+          </p:nvPr>
+        </p:nvSpPr>
+        <p:spPr>
+          <a:xfrm>
+            <a:off x="3884613" y="8685213"/>
+            <a:ext cx="2971800" cy="458787"/>
+          </a:xfrm>
+          <a:prstGeom prst="rect">
+            <a:avLst/>
+          </a:prstGeom>
+        </p:spPr>
+        <p:txBody>
+          <a:bodyPr vert="horz" lIns="91440" tIns="45720" rIns="91440" bIns="45720" rtlCol="0" anchor="b"/>
+          <a:lstStyle>
+            <a:lvl1pPr algn="r">
+              <a:defRPr sz="1200"/>
+            </a:lvl1pPr>
+          </a:lstStyle>
+          <a:p>
+            <a:fld id="{77AF590E-3A69-3341-925C-7F53DE78D8B7}" type="slidenum">
+              <a:rPr lang="en-IL" smtClean="0"/>
+              <a:t>‹#›</a:t>
+            </a:fld>
+            <a:endParaRPr lang="en-IL"/>
+          </a:p>
+        </p:txBody>
+      </p:sp>
+    </p:spTree>
+    <p:extLst>
+      <p:ext uri="{BB962C8B-B14F-4D97-AF65-F5344CB8AC3E}">
+        <p14:creationId xmlns:p14="http://schemas.microsoft.com/office/powerpoint/2010/main" val="3725709871"/>
+      </p:ext>
+    </p:extLst>
+  </p:cSld>
+  <p:clrMap bg1="lt1" tx1="dk1" bg2="lt2" tx2="dk2" accent1="accent1" accent2="accent2" accent3="accent3" accent4="accent4" accent5="accent5" accent6="accent6" hlink="hlink" folHlink="folHlink"/>
+  <p:notesStyle>
+    <a:lvl1pPr marL="0" algn="l" defTabSz="914400" rtl="0" eaLnBrk="1" latinLnBrk="0" hangingPunct="1">
+      <a:defRPr sz="1200" kern="1200">
+        <a:solidFill>
+          <a:schemeClr val="tx1"/>
+        </a:solidFill>
+        <a:latin typeface="+mn-lt"/>
+        <a:ea typeface="+mn-ea"/>
+        <a:cs typeface="+mn-cs"/>
+      </a:defRPr>
+    </a:lvl1pPr>
+    <a:lvl2pPr marL="457200" algn="l" defTabSz="914400" rtl="0" eaLnBrk="1" latinLnBrk="0" hangingPunct="1">
+      <a:defRPr sz="1200" kern="1200">
+        <a:solidFill>
+          <a:schemeClr val="tx1"/>
+        </a:solidFill>
+        <a:latin typeface="+mn-lt"/>
+        <a:ea typeface="+mn-ea"/>
+        <a:cs typeface="+mn-cs"/>
+      </a:defRPr>
+    </a:lvl2pPr>
+    <a:lvl3pPr marL="914400" algn="l" defTabSz="914400" rtl="0" eaLnBrk="1" latinLnBrk="0" hangingPunct="1">
+      <a:defRPr sz="1200" kern="1200">
+        <a:solidFill>
+          <a:schemeClr val="tx1"/>
+        </a:solidFill>
+        <a:latin typeface="+mn-lt"/>
+        <a:ea typeface="+mn-ea"/>
+        <a:cs typeface="+mn-cs"/>
+      </a:defRPr>
+    </a:lvl3pPr>
+    <a:lvl4pPr marL="1371600" algn="l" defTabSz="914400" rtl="0" eaLnBrk="1" latinLnBrk="0" hangingPunct="1">
+      <a:defRPr sz="1200" kern="1200">
+        <a:solidFill>
+          <a:schemeClr val="tx1"/>
+        </a:solidFill>
+        <a:latin typeface="+mn-lt"/>
+        <a:ea typeface="+mn-ea"/>
+        <a:cs typeface="+mn-cs"/>
+      </a:defRPr>
+    </a:lvl4pPr>
+    <a:lvl5pPr marL="1828800" algn="l" defTabSz="914400" rtl="0" eaLnBrk="1" latinLnBrk="0" hangingPunct="1">
+      <a:defRPr sz="1200" kern="1200">
+        <a:solidFill>
+          <a:schemeClr val="tx1"/>
+        </a:solidFill>
+        <a:latin typeface="+mn-lt"/>
+        <a:ea typeface="+mn-ea"/>
+        <a:cs typeface="+mn-cs"/>
+      </a:defRPr>
+    </a:lvl5pPr>
+    <a:lvl6pPr marL="2286000" algn="l" defTabSz="914400" rtl="0" eaLnBrk="1" latinLnBrk="0" hangingPunct="1">
+      <a:defRPr sz="1200" kern="1200">
+        <a:solidFill>
+          <a:schemeClr val="tx1"/>
+        </a:solidFill>
+        <a:latin typeface="+mn-lt"/>
+        <a:ea typeface="+mn-ea"/>
+        <a:cs typeface="+mn-cs"/>
+      </a:defRPr>
+    </a:lvl6pPr>
+    <a:lvl7pPr marL="2743200" algn="l" defTabSz="914400" rtl="0" eaLnBrk="1" latinLnBrk="0" hangingPunct="1">
+      <a:defRPr sz="1200" kern="1200">
+        <a:solidFill>
+          <a:schemeClr val="tx1"/>
+        </a:solidFill>
+        <a:latin typeface="+mn-lt"/>
+        <a:ea typeface="+mn-ea"/>
+        <a:cs typeface="+mn-cs"/>
+      </a:defRPr>
+    </a:lvl7pPr>
+    <a:lvl8pPr marL="3200400" algn="l" defTabSz="914400" rtl="0" eaLnBrk="1" latinLnBrk="0" hangingPunct="1">
+      <a:defRPr sz="1200" kern="1200">
+        <a:solidFill>
+          <a:schemeClr val="tx1"/>
+        </a:solidFill>
+        <a:latin typeface="+mn-lt"/>
+        <a:ea typeface="+mn-ea"/>
+        <a:cs typeface="+mn-cs"/>
+      </a:defRPr>
+    </a:lvl8pPr>
+    <a:lvl9pPr marL="3657600" algn="l" defTabSz="914400" rtl="0" eaLnBrk="1" latinLnBrk="0" hangingPunct="1">
+      <a:defRPr sz="1200" kern="1200">
+        <a:solidFill>
+          <a:schemeClr val="tx1"/>
+        </a:solidFill>
+        <a:latin typeface="+mn-lt"/>
+        <a:ea typeface="+mn-ea"/>
+        <a:cs typeface="+mn-cs"/>
+      </a:defRPr>
+    </a:lvl9pPr>
+  </p:notesStyle>
+</p:notesMaster>
+</file>
+
+<file path=ppt/notesSlides/notesSlide1.xml><?xml version="1.0" encoding="utf-8"?>
+<p:notes xmlns:a="http://schemas.openxmlformats.org/drawingml/2006/main" xmlns:r="http://schemas.openxmlformats.org/officeDocument/2006/relationships" xmlns:p="http://schemas.openxmlformats.org/presentationml/2006/main">
+  <p:cSld>
+    <p:spTree>
+      <p:nvGrpSpPr>
+        <p:cNvPr id="1" name=""/>
+        <p:cNvGrpSpPr/>
+        <p:nvPr/>
+      </p:nvGrpSpPr>
+      <p:grpSpPr>
+        <a:xfrm>
+          <a:off x="0" y="0"/>
+          <a:ext cx="0" cy="0"/>
+          <a:chOff x="0" y="0"/>
+          <a:chExt cx="0" cy="0"/>
+        </a:xfrm>
+      </p:grpSpPr>
+      <p:sp>
+        <p:nvSpPr>
+          <p:cNvPr id="2" name="Slide Image Placeholder 1"/>
+          <p:cNvSpPr>
+            <a:spLocks noGrp="1" noRot="1" noChangeAspect="1"/>
+          </p:cNvSpPr>
+          <p:nvPr>
+            <p:ph type="sldImg"/>
+          </p:nvPr>
+        </p:nvSpPr>
+        <p:spPr/>
+      </p:sp>
+      <p:sp>
+        <p:nvSpPr>
+          <p:cNvPr id="3" name="Notes Placeholder 2"/>
+          <p:cNvSpPr>
+            <a:spLocks noGrp="1"/>
+          </p:cNvSpPr>
+          <p:nvPr>
+            <p:ph type="body" idx="1"/>
+          </p:nvPr>
+        </p:nvSpPr>
+        <p:spPr/>
+        <p:txBody>
+          <a:bodyPr/>
+          <a:lstStyle/>
+          <a:p>
+            <a:endParaRPr lang="en-IL" dirty="0"/>
+          </a:p>
+        </p:txBody>
+      </p:sp>
+      <p:sp>
+        <p:nvSpPr>
+          <p:cNvPr id="4" name="Slide Number Placeholder 3"/>
+          <p:cNvSpPr>
+            <a:spLocks noGrp="1"/>
+          </p:cNvSpPr>
+          <p:nvPr>
+            <p:ph type="sldNum" sz="quarter" idx="5"/>
+          </p:nvPr>
+        </p:nvSpPr>
+        <p:spPr/>
+        <p:txBody>
+          <a:bodyPr/>
+          <a:lstStyle/>
+          <a:p>
+            <a:fld id="{77AF590E-3A69-3341-925C-7F53DE78D8B7}" type="slidenum">
+              <a:rPr lang="en-IL" smtClean="0"/>
+              <a:t>10</a:t>
+            </a:fld>
+            <a:endParaRPr lang="en-IL"/>
+          </a:p>
+        </p:txBody>
+      </p:sp>
+    </p:spTree>
+    <p:extLst>
+      <p:ext uri="{BB962C8B-B14F-4D97-AF65-F5344CB8AC3E}">
+        <p14:creationId xmlns:p14="http://schemas.microsoft.com/office/powerpoint/2010/main" val="2468407903"/>
+      </p:ext>
+    </p:extLst>
+  </p:cSld>
+  <p:clrMapOvr>
+    <a:masterClrMapping/>
+  </p:clrMapOvr>
+</p:notes>
+</file>
+
 <file path=ppt/slideLayouts/slideLayout1.xml><?xml version="1.0" encoding="utf-8"?>
 <p:sldLayout xmlns:a="http://schemas.openxmlformats.org/drawingml/2006/main" xmlns:r="http://schemas.openxmlformats.org/officeDocument/2006/relationships" xmlns:p="http://schemas.openxmlformats.org/presentationml/2006/main" type="title" preserve="1">
   <p:cSld name="Title Slide">
@@ -545,7 +982,7 @@
           <a:p>
             <a:fld id="{5BCAD085-E8A6-8845-BD4E-CB4CCA059FC4}" type="datetimeFigureOut">
               <a:rPr lang="en-US" smtClean="0"/>
-              <a:t>6/16/2026</a:t>
+              <a:t>6/16/26</a:t>
             </a:fld>
             <a:endParaRPr lang="en-US"/>
           </a:p>
@@ -713,7 +1150,7 @@
           <a:p>
             <a:fld id="{5BCAD085-E8A6-8845-BD4E-CB4CCA059FC4}" type="datetimeFigureOut">
               <a:rPr lang="en-US" smtClean="0"/>
-              <a:t>6/16/2026</a:t>
+              <a:t>6/16/26</a:t>
             </a:fld>
             <a:endParaRPr lang="en-US"/>
           </a:p>
@@ -891,7 +1328,7 @@
           <a:p>
             <a:fld id="{5BCAD085-E8A6-8845-BD4E-CB4CCA059FC4}" type="datetimeFigureOut">
               <a:rPr lang="en-US" smtClean="0"/>
-              <a:t>6/16/2026</a:t>
+              <a:t>6/16/26</a:t>
             </a:fld>
             <a:endParaRPr lang="en-US"/>
           </a:p>
@@ -1059,7 +1496,7 @@
           <a:p>
             <a:fld id="{5BCAD085-E8A6-8845-BD4E-CB4CCA059FC4}" type="datetimeFigureOut">
               <a:rPr lang="en-US" smtClean="0"/>
-              <a:t>6/16/2026</a:t>
+              <a:t>6/16/26</a:t>
             </a:fld>
             <a:endParaRPr lang="en-US"/>
           </a:p>
@@ -1304,7 +1741,7 @@
           <a:p>
             <a:fld id="{5BCAD085-E8A6-8845-BD4E-CB4CCA059FC4}" type="datetimeFigureOut">
               <a:rPr lang="en-US" smtClean="0"/>
-              <a:t>6/16/2026</a:t>
+              <a:t>6/16/26</a:t>
             </a:fld>
             <a:endParaRPr lang="en-US"/>
           </a:p>
@@ -1589,7 +2026,7 @@
           <a:p>
             <a:fld id="{5BCAD085-E8A6-8845-BD4E-CB4CCA059FC4}" type="datetimeFigureOut">
               <a:rPr lang="en-US" smtClean="0"/>
-              <a:t>6/16/2026</a:t>
+              <a:t>6/16/26</a:t>
             </a:fld>
             <a:endParaRPr lang="en-US"/>
           </a:p>
@@ -2008,7 +2445,7 @@
           <a:p>
             <a:fld id="{5BCAD085-E8A6-8845-BD4E-CB4CCA059FC4}" type="datetimeFigureOut">
               <a:rPr lang="en-US" smtClean="0"/>
-              <a:t>6/16/2026</a:t>
+              <a:t>6/16/26</a:t>
             </a:fld>
             <a:endParaRPr lang="en-US"/>
           </a:p>
@@ -2125,7 +2562,7 @@
           <a:p>
             <a:fld id="{5BCAD085-E8A6-8845-BD4E-CB4CCA059FC4}" type="datetimeFigureOut">
               <a:rPr lang="en-US" smtClean="0"/>
-              <a:t>6/16/2026</a:t>
+              <a:t>6/16/26</a:t>
             </a:fld>
             <a:endParaRPr lang="en-US"/>
           </a:p>
@@ -2220,7 +2657,7 @@
           <a:p>
             <a:fld id="{5BCAD085-E8A6-8845-BD4E-CB4CCA059FC4}" type="datetimeFigureOut">
               <a:rPr lang="en-US" smtClean="0"/>
-              <a:t>6/16/2026</a:t>
+              <a:t>6/16/26</a:t>
             </a:fld>
             <a:endParaRPr lang="en-US"/>
           </a:p>
@@ -2495,7 +2932,7 @@
           <a:p>
             <a:fld id="{5BCAD085-E8A6-8845-BD4E-CB4CCA059FC4}" type="datetimeFigureOut">
               <a:rPr lang="en-US" smtClean="0"/>
-              <a:t>6/16/2026</a:t>
+              <a:t>6/16/26</a:t>
             </a:fld>
             <a:endParaRPr lang="en-US"/>
           </a:p>
@@ -2747,7 +3184,7 @@
           <a:p>
             <a:fld id="{5BCAD085-E8A6-8845-BD4E-CB4CCA059FC4}" type="datetimeFigureOut">
               <a:rPr lang="en-US" smtClean="0"/>
-              <a:t>6/16/2026</a:t>
+              <a:t>6/16/26</a:t>
             </a:fld>
             <a:endParaRPr lang="en-US"/>
           </a:p>
@@ -2958,7 +3395,7 @@
           <a:p>
             <a:fld id="{5BCAD085-E8A6-8845-BD4E-CB4CCA059FC4}" type="datetimeFigureOut">
               <a:rPr lang="en-US" smtClean="0"/>
-              <a:t>6/16/2026</a:t>
+              <a:t>6/16/26</a:t>
             </a:fld>
             <a:endParaRPr lang="en-US"/>
           </a:p>
@@ -3708,144 +4145,14 @@
       </p:sp>
       <p:sp>
         <p:nvSpPr>
-          <p:cNvPr id="5" name="Rounded Rectangle 4"/>
-          <p:cNvSpPr/>
-          <p:nvPr/>
-        </p:nvSpPr>
-        <p:spPr>
-          <a:xfrm>
-            <a:off x="731520" y="1234440"/>
-            <a:ext cx="5257800" cy="4023360"/>
-          </a:xfrm>
-          <a:prstGeom prst="roundRect">
-            <a:avLst/>
-          </a:prstGeom>
-          <a:solidFill>
-            <a:srgbClr val="F8F9FB"/>
-          </a:solidFill>
-          <a:ln w="15240">
-            <a:solidFill>
-              <a:srgbClr val="B9C3CD"/>
-            </a:solidFill>
-          </a:ln>
-        </p:spPr>
-        <p:style>
-          <a:lnRef idx="1">
-            <a:schemeClr val="accent1"/>
-          </a:lnRef>
-          <a:fillRef idx="3">
-            <a:schemeClr val="accent1"/>
-          </a:fillRef>
-          <a:effectRef idx="2">
-            <a:schemeClr val="accent1"/>
-          </a:effectRef>
-          <a:fontRef idx="minor">
-            <a:schemeClr val="lt1"/>
-          </a:fontRef>
-        </p:style>
-        <p:txBody>
-          <a:bodyPr lIns="164592" tIns="109728" rIns="164592" rtlCol="0" anchor="ctr"/>
-          <a:lstStyle/>
-          <a:p>
-            <a:pPr algn="ctr"/>
-            <a:r>
-              <a:rPr sz="1500" b="1">
-                <a:solidFill>
-                  <a:srgbClr val="1F3A56"/>
-                </a:solidFill>
-                <a:latin typeface="Aptos"/>
-              </a:rPr>
-              <a:t>Loss curve
-</a:t>
-            </a:r>
-            <a:r>
-              <a:rPr sz="1200">
-                <a:solidFill>
-                  <a:srgbClr val="5F6973"/>
-                </a:solidFill>
-                <a:latin typeface="Aptos"/>
-              </a:rPr>
-              <a:t>Training loss vs epochs
-Validation loss vs epochs</a:t>
-            </a:r>
-          </a:p>
-        </p:txBody>
-      </p:sp>
-      <p:sp>
-        <p:nvSpPr>
-          <p:cNvPr id="6" name="Rounded Rectangle 5"/>
-          <p:cNvSpPr/>
-          <p:nvPr/>
-        </p:nvSpPr>
-        <p:spPr>
-          <a:xfrm>
-            <a:off x="6217920" y="1234440"/>
-            <a:ext cx="5257800" cy="4023360"/>
-          </a:xfrm>
-          <a:prstGeom prst="roundRect">
-            <a:avLst/>
-          </a:prstGeom>
-          <a:solidFill>
-            <a:srgbClr val="F8F9FB"/>
-          </a:solidFill>
-          <a:ln w="15240">
-            <a:solidFill>
-              <a:srgbClr val="B9C3CD"/>
-            </a:solidFill>
-          </a:ln>
-        </p:spPr>
-        <p:style>
-          <a:lnRef idx="1">
-            <a:schemeClr val="accent1"/>
-          </a:lnRef>
-          <a:fillRef idx="3">
-            <a:schemeClr val="accent1"/>
-          </a:fillRef>
-          <a:effectRef idx="2">
-            <a:schemeClr val="accent1"/>
-          </a:effectRef>
-          <a:fontRef idx="minor">
-            <a:schemeClr val="lt1"/>
-          </a:fontRef>
-        </p:style>
-        <p:txBody>
-          <a:bodyPr lIns="164592" tIns="109728" rIns="164592" rtlCol="0" anchor="ctr"/>
-          <a:lstStyle/>
-          <a:p>
-            <a:pPr algn="ctr"/>
-            <a:r>
-              <a:rPr sz="1500" b="1">
-                <a:solidFill>
-                  <a:srgbClr val="1F3A56"/>
-                </a:solidFill>
-                <a:latin typeface="Aptos"/>
-              </a:rPr>
-              <a:t>Metric curve
-</a:t>
-            </a:r>
-            <a:r>
-              <a:rPr sz="1200">
-                <a:solidFill>
-                  <a:srgbClr val="5F6973"/>
-                </a:solidFill>
-                <a:latin typeface="Aptos"/>
-              </a:rPr>
-              <a:t>Dice coefficient vs epochs
-Training + validation</a:t>
-            </a:r>
-          </a:p>
-        </p:txBody>
-      </p:sp>
-      <p:sp>
-        <p:nvSpPr>
           <p:cNvPr id="7" name="TextBox 6"/>
           <p:cNvSpPr txBox="1"/>
           <p:nvPr/>
         </p:nvSpPr>
         <p:spPr>
           <a:xfrm>
-            <a:off x="868680" y="5577840"/>
-            <a:ext cx="10058400" cy="411480"/>
+            <a:off x="868680" y="5192794"/>
+            <a:ext cx="10058400" cy="270843"/>
           </a:xfrm>
           <a:prstGeom prst="rect">
             <a:avLst/>
@@ -3870,27 +4177,103 @@
               </a:defRPr>
             </a:pPr>
             <a:r>
-              <a:t>Generate after retraining</a:t>
-            </a:r>
-          </a:p>
-          <a:p>
-            <a:pPr>
-              <a:spcAft>
-                <a:spcPts val="600"/>
-              </a:spcAft>
-              <a:defRPr sz="1400">
-                <a:solidFill>
-                  <a:srgbClr val="282828"/>
-                </a:solidFill>
-                <a:latin typeface="Aptos"/>
-              </a:defRPr>
-            </a:pPr>
-            <a:r>
-              <a:t>Keep plots simple: black/gray lines, no heavy styling</a:t>
-            </a:r>
-          </a:p>
-        </p:txBody>
-      </p:sp>
+              <a:rPr lang="en-US" dirty="0"/>
+              <a:t>We had to find a suitable loss function:</a:t>
+            </a:r>
+            <a:endParaRPr dirty="0"/>
+          </a:p>
+        </p:txBody>
+      </p:sp>
+      <p:pic>
+        <p:nvPicPr>
+          <p:cNvPr id="9" name="Picture 8">
+            <a:extLst>
+              <a:ext uri="{FF2B5EF4-FFF2-40B4-BE49-F238E27FC236}">
+                <a16:creationId xmlns:a16="http://schemas.microsoft.com/office/drawing/2014/main" id="{23B88130-D976-2D4B-819B-A041C1F290EC}"/>
+              </a:ext>
+            </a:extLst>
+          </p:cNvPr>
+          <p:cNvPicPr>
+            <a:picLocks noChangeAspect="1"/>
+          </p:cNvPicPr>
+          <p:nvPr/>
+        </p:nvPicPr>
+        <p:blipFill>
+          <a:blip r:embed="rId3"/>
+          <a:stretch>
+            <a:fillRect/>
+          </a:stretch>
+        </p:blipFill>
+        <p:spPr>
+          <a:xfrm>
+            <a:off x="324293" y="1382170"/>
+            <a:ext cx="5573587" cy="3483492"/>
+          </a:xfrm>
+          <a:prstGeom prst="rect">
+            <a:avLst/>
+          </a:prstGeom>
+        </p:spPr>
+      </p:pic>
+      <p:pic>
+        <p:nvPicPr>
+          <p:cNvPr id="11" name="Picture 10">
+            <a:extLst>
+              <a:ext uri="{FF2B5EF4-FFF2-40B4-BE49-F238E27FC236}">
+                <a16:creationId xmlns:a16="http://schemas.microsoft.com/office/drawing/2014/main" id="{088BD807-AC93-59E4-BE6C-7FA9825B4700}"/>
+              </a:ext>
+            </a:extLst>
+          </p:cNvPr>
+          <p:cNvPicPr>
+            <a:picLocks noChangeAspect="1"/>
+          </p:cNvPicPr>
+          <p:nvPr/>
+        </p:nvPicPr>
+        <p:blipFill>
+          <a:blip r:embed="rId4"/>
+          <a:stretch>
+            <a:fillRect/>
+          </a:stretch>
+        </p:blipFill>
+        <p:spPr>
+          <a:xfrm>
+            <a:off x="6080760" y="1343406"/>
+            <a:ext cx="5697634" cy="3561021"/>
+          </a:xfrm>
+          <a:prstGeom prst="rect">
+            <a:avLst/>
+          </a:prstGeom>
+        </p:spPr>
+      </p:pic>
+      <p:pic>
+        <p:nvPicPr>
+          <p:cNvPr id="13" name="Picture 12">
+            <a:extLst>
+              <a:ext uri="{FF2B5EF4-FFF2-40B4-BE49-F238E27FC236}">
+                <a16:creationId xmlns:a16="http://schemas.microsoft.com/office/drawing/2014/main" id="{9A151A8F-D97E-3C5A-9BA2-4DA875BEBBAC}"/>
+              </a:ext>
+            </a:extLst>
+          </p:cNvPr>
+          <p:cNvPicPr>
+            <a:picLocks noChangeAspect="1"/>
+          </p:cNvPicPr>
+          <p:nvPr/>
+        </p:nvPicPr>
+        <p:blipFill>
+          <a:blip r:embed="rId5"/>
+          <a:stretch>
+            <a:fillRect/>
+          </a:stretch>
+        </p:blipFill>
+        <p:spPr>
+          <a:xfrm>
+            <a:off x="4260850" y="5268263"/>
+            <a:ext cx="3670300" cy="1168400"/>
+          </a:xfrm>
+          <a:prstGeom prst="rect">
+            <a:avLst/>
+          </a:prstGeom>
+        </p:spPr>
+      </p:pic>
     </p:spTree>
   </p:cSld>
   <p:clrMapOvr>
@@ -4591,8 +4974,8 @@
           </a:graphicData>
         </a:graphic>
       </p:graphicFrame>
-      <mc:AlternateContent xmlns:mc="http://schemas.openxmlformats.org/markup-compatibility/2006">
-        <mc:Choice xmlns:a14="http://schemas.microsoft.com/office/drawing/2010/main" Requires="a14">
+      <mc:AlternateContent xmlns:mc="http://schemas.openxmlformats.org/markup-compatibility/2006" xmlns:a14="http://schemas.microsoft.com/office/drawing/2010/main">
+        <mc:Choice Requires="a14">
           <p:sp>
             <p:nvSpPr>
               <p:cNvPr id="6" name="TextBox 5"/>
@@ -4685,7 +5068,7 @@
             </p:txBody>
           </p:sp>
         </mc:Choice>
-        <mc:Fallback>
+        <mc:Fallback xmlns="">
           <p:sp>
             <p:nvSpPr>
               <p:cNvPr id="6" name="TextBox 5"/>
@@ -7206,8 +7589,8 @@
           </a:p>
         </p:txBody>
       </p:sp>
-      <mc:AlternateContent xmlns:mc="http://schemas.openxmlformats.org/markup-compatibility/2006">
-        <mc:Choice xmlns:a14="http://schemas.microsoft.com/office/drawing/2010/main" Requires="a14">
+      <mc:AlternateContent xmlns:mc="http://schemas.openxmlformats.org/markup-compatibility/2006" xmlns:a14="http://schemas.microsoft.com/office/drawing/2010/main">
+        <mc:Choice Requires="a14">
           <p:sp>
             <p:nvSpPr>
               <p:cNvPr id="7" name="Rounded Rectangle 6"/>
@@ -7368,7 +7751,7 @@
             </p:txBody>
           </p:sp>
         </mc:Choice>
-        <mc:Fallback>
+        <mc:Fallback xmlns="">
           <p:sp>
             <p:nvSpPr>
               <p:cNvPr id="7" name="Rounded Rectangle 6"/>
@@ -7627,8 +8010,8 @@
         </p:nvSpPr>
         <p:spPr>
           <a:xfrm>
-            <a:off x="777240" y="1280160"/>
-            <a:ext cx="5394960" cy="1380744"/>
+            <a:off x="640079" y="3945232"/>
+            <a:ext cx="10839609" cy="1009856"/>
           </a:xfrm>
           <a:prstGeom prst="roundRect">
             <a:avLst/>
@@ -7672,130 +8055,13 @@
       </p:sp>
       <p:sp>
         <p:nvSpPr>
-          <p:cNvPr id="6" name="Rounded Rectangle 5"/>
-          <p:cNvSpPr/>
-          <p:nvPr/>
-        </p:nvSpPr>
-        <p:spPr>
-          <a:xfrm>
-            <a:off x="777240" y="2898648"/>
-            <a:ext cx="5394960" cy="1426464"/>
-          </a:xfrm>
-          <a:prstGeom prst="roundRect">
-            <a:avLst/>
-          </a:prstGeom>
-          <a:solidFill>
-            <a:srgbClr val="FAFBFC"/>
-          </a:solidFill>
-          <a:ln>
-            <a:solidFill>
-              <a:srgbClr val="B9C3CD"/>
-            </a:solidFill>
-          </a:ln>
-        </p:spPr>
-        <p:style>
-          <a:lnRef idx="1">
-            <a:schemeClr val="accent1"/>
-          </a:lnRef>
-          <a:fillRef idx="3">
-            <a:schemeClr val="accent1"/>
-          </a:fillRef>
-          <a:effectRef idx="2">
-            <a:schemeClr val="accent1"/>
-          </a:effectRef>
-          <a:fontRef idx="minor">
-            <a:schemeClr val="lt1"/>
-          </a:fontRef>
-        </p:style>
-        <p:txBody>
-          <a:bodyPr lIns="182880" rIns="182880" rtlCol="0" anchor="ctr"/>
-          <a:lstStyle/>
-          <a:p>
-            <a:pPr algn="ctr"/>
-            <a:endParaRPr sz="2000" dirty="0">
-              <a:solidFill>
-                <a:srgbClr val="282828"/>
-              </a:solidFill>
-              <a:latin typeface="Cambria Math"/>
-            </a:endParaRPr>
-          </a:p>
-        </p:txBody>
-      </p:sp>
-      <p:sp>
-        <p:nvSpPr>
-          <p:cNvPr id="7" name="Rounded Rectangle 6"/>
-          <p:cNvSpPr/>
-          <p:nvPr/>
-        </p:nvSpPr>
-        <p:spPr>
-          <a:xfrm>
-            <a:off x="6400800" y="1184148"/>
-            <a:ext cx="4983480" cy="3200400"/>
-          </a:xfrm>
-          <a:prstGeom prst="roundRect">
-            <a:avLst/>
-          </a:prstGeom>
-          <a:solidFill>
-            <a:srgbClr val="F8F9FB"/>
-          </a:solidFill>
-          <a:ln w="15240">
-            <a:solidFill>
-              <a:srgbClr val="B9C3CD"/>
-            </a:solidFill>
-          </a:ln>
-        </p:spPr>
-        <p:style>
-          <a:lnRef idx="1">
-            <a:schemeClr val="accent1"/>
-          </a:lnRef>
-          <a:fillRef idx="3">
-            <a:schemeClr val="accent1"/>
-          </a:fillRef>
-          <a:effectRef idx="2">
-            <a:schemeClr val="accent1"/>
-          </a:effectRef>
-          <a:fontRef idx="minor">
-            <a:schemeClr val="lt1"/>
-          </a:fontRef>
-        </p:style>
-        <p:txBody>
-          <a:bodyPr lIns="164592" tIns="109728" rIns="164592" rtlCol="0" anchor="ctr"/>
-          <a:lstStyle/>
-          <a:p>
-            <a:pPr algn="ctr"/>
-            <a:r>
-              <a:rPr sz="1500" b="1" dirty="0">
-                <a:solidFill>
-                  <a:srgbClr val="1F3A56"/>
-                </a:solidFill>
-                <a:latin typeface="Aptos"/>
-              </a:rPr>
-              <a:t>Diagram placeholder
-</a:t>
-            </a:r>
-            <a:r>
-              <a:rPr sz="1200" dirty="0">
-                <a:solidFill>
-                  <a:srgbClr val="5F6973"/>
-                </a:solidFill>
-                <a:latin typeface="Aptos"/>
-              </a:rPr>
-              <a:t>CFAR window → convolution kernel
-Training cells become fixed nonzero weights
-Guard/CUT become zeros</a:t>
-            </a:r>
-          </a:p>
-        </p:txBody>
-      </p:sp>
-      <p:sp>
-        <p:nvSpPr>
           <p:cNvPr id="8" name="TextBox 7"/>
           <p:cNvSpPr txBox="1"/>
           <p:nvPr/>
         </p:nvSpPr>
         <p:spPr>
           <a:xfrm>
-            <a:off x="868680" y="4526280"/>
+            <a:off x="777240" y="5174866"/>
             <a:ext cx="10515600" cy="960120"/>
           </a:xfrm>
           <a:prstGeom prst="rect">
@@ -7883,7 +8149,7 @@
         </p:blipFill>
         <p:spPr>
           <a:xfrm>
-            <a:off x="2198529" y="1816821"/>
+            <a:off x="1645991" y="4260792"/>
             <a:ext cx="2552381" cy="371429"/>
           </a:xfrm>
           <a:prstGeom prst="rect">
@@ -7913,8 +8179,38 @@
         </p:blipFill>
         <p:spPr>
           <a:xfrm>
-            <a:off x="1091381" y="3330888"/>
-            <a:ext cx="4909984" cy="580271"/>
+            <a:off x="6035040" y="4165724"/>
+            <a:ext cx="4983480" cy="588957"/>
+          </a:xfrm>
+          <a:prstGeom prst="rect">
+            <a:avLst/>
+          </a:prstGeom>
+        </p:spPr>
+      </p:pic>
+      <p:pic>
+        <p:nvPicPr>
+          <p:cNvPr id="11" name="Picture 10">
+            <a:extLst>
+              <a:ext uri="{FF2B5EF4-FFF2-40B4-BE49-F238E27FC236}">
+                <a16:creationId xmlns:a16="http://schemas.microsoft.com/office/drawing/2014/main" id="{23C8D478-AA97-366E-BBEA-D02005999E77}"/>
+              </a:ext>
+            </a:extLst>
+          </p:cNvPr>
+          <p:cNvPicPr>
+            <a:picLocks noChangeAspect="1"/>
+          </p:cNvPicPr>
+          <p:nvPr/>
+        </p:nvPicPr>
+        <p:blipFill>
+          <a:blip r:embed="rId4"/>
+          <a:stretch>
+            <a:fillRect/>
+          </a:stretch>
+        </p:blipFill>
+        <p:spPr>
+          <a:xfrm>
+            <a:off x="2209800" y="1353950"/>
+            <a:ext cx="7772400" cy="2331163"/>
           </a:xfrm>
           <a:prstGeom prst="rect">
             <a:avLst/>
@@ -9966,771 +10262,12 @@
           </a:p>
         </p:txBody>
       </p:sp>
-      <p:sp>
-        <p:nvSpPr>
-          <p:cNvPr id="5" name="Rounded Rectangle 4"/>
-          <p:cNvSpPr/>
-          <p:nvPr/>
-        </p:nvSpPr>
-        <p:spPr>
-          <a:xfrm>
-            <a:off x="685800" y="2194560"/>
-            <a:ext cx="1051560" cy="731520"/>
-          </a:xfrm>
-          <a:prstGeom prst="roundRect">
-            <a:avLst/>
-          </a:prstGeom>
-          <a:solidFill>
-            <a:srgbClr val="F8F9FB"/>
-          </a:solidFill>
-          <a:ln>
-            <a:solidFill>
-              <a:srgbClr val="B9C3CD"/>
-            </a:solidFill>
-          </a:ln>
-        </p:spPr>
-        <p:style>
-          <a:lnRef idx="1">
-            <a:schemeClr val="accent1"/>
-          </a:lnRef>
-          <a:fillRef idx="3">
-            <a:schemeClr val="accent1"/>
-          </a:fillRef>
-          <a:effectRef idx="2">
-            <a:schemeClr val="accent1"/>
-          </a:effectRef>
-          <a:fontRef idx="minor">
-            <a:schemeClr val="lt1"/>
-          </a:fontRef>
-        </p:style>
-        <p:txBody>
-          <a:bodyPr rtlCol="0" anchor="ctr"/>
-          <a:lstStyle/>
-          <a:p>
-            <a:pPr algn="ctr"/>
-            <a:r>
-              <a:rPr sz="1000" b="1">
-                <a:solidFill>
-                  <a:srgbClr val="282828"/>
-                </a:solidFill>
-                <a:latin typeface="Aptos"/>
-              </a:rPr>
-              <a:t>Input
-Profile</a:t>
-            </a:r>
-          </a:p>
-        </p:txBody>
-      </p:sp>
-      <p:cxnSp>
-        <p:nvCxnSpPr>
-          <p:cNvPr id="6" name="Connector 5"/>
-          <p:cNvCxnSpPr/>
-          <p:nvPr/>
-        </p:nvCxnSpPr>
-        <p:spPr>
-          <a:xfrm>
-            <a:off x="1737360" y="2560320"/>
-            <a:ext cx="320040" cy="0"/>
-          </a:xfrm>
-          <a:prstGeom prst="line">
-            <a:avLst/>
-          </a:prstGeom>
-          <a:ln w="19050">
-            <a:solidFill>
-              <a:srgbClr val="46698C"/>
-            </a:solidFill>
-          </a:ln>
-        </p:spPr>
-        <p:style>
-          <a:lnRef idx="2">
-            <a:schemeClr val="accent1"/>
-          </a:lnRef>
-          <a:fillRef idx="0">
-            <a:schemeClr val="accent1"/>
-          </a:fillRef>
-          <a:effectRef idx="1">
-            <a:schemeClr val="accent1"/>
-          </a:effectRef>
-          <a:fontRef idx="minor">
-            <a:schemeClr val="tx1"/>
-          </a:fontRef>
-        </p:style>
-      </p:cxnSp>
-      <p:sp>
-        <p:nvSpPr>
-          <p:cNvPr id="7" name="Rounded Rectangle 6"/>
-          <p:cNvSpPr/>
-          <p:nvPr/>
-        </p:nvSpPr>
-        <p:spPr>
-          <a:xfrm>
-            <a:off x="2057400" y="2194560"/>
-            <a:ext cx="1051560" cy="731520"/>
-          </a:xfrm>
-          <a:prstGeom prst="roundRect">
-            <a:avLst/>
-          </a:prstGeom>
-          <a:solidFill>
-            <a:srgbClr val="F8F9FB"/>
-          </a:solidFill>
-          <a:ln>
-            <a:solidFill>
-              <a:srgbClr val="B9C3CD"/>
-            </a:solidFill>
-          </a:ln>
-        </p:spPr>
-        <p:style>
-          <a:lnRef idx="1">
-            <a:schemeClr val="accent1"/>
-          </a:lnRef>
-          <a:fillRef idx="3">
-            <a:schemeClr val="accent1"/>
-          </a:fillRef>
-          <a:effectRef idx="2">
-            <a:schemeClr val="accent1"/>
-          </a:effectRef>
-          <a:fontRef idx="minor">
-            <a:schemeClr val="lt1"/>
-          </a:fontRef>
-        </p:style>
-        <p:txBody>
-          <a:bodyPr rtlCol="0" anchor="ctr"/>
-          <a:lstStyle/>
-          <a:p>
-            <a:pPr algn="ctr"/>
-            <a:r>
-              <a:rPr sz="1000" b="1">
-                <a:solidFill>
-                  <a:srgbClr val="282828"/>
-                </a:solidFill>
-                <a:latin typeface="Aptos"/>
-              </a:rPr>
-              <a:t>Conv1D
-k=7</a:t>
-            </a:r>
-          </a:p>
-        </p:txBody>
-      </p:sp>
-      <p:cxnSp>
-        <p:nvCxnSpPr>
-          <p:cNvPr id="8" name="Connector 7"/>
-          <p:cNvCxnSpPr/>
-          <p:nvPr/>
-        </p:nvCxnSpPr>
-        <p:spPr>
-          <a:xfrm>
-            <a:off x="3108960" y="2560320"/>
-            <a:ext cx="320040" cy="0"/>
-          </a:xfrm>
-          <a:prstGeom prst="line">
-            <a:avLst/>
-          </a:prstGeom>
-          <a:ln w="19050">
-            <a:solidFill>
-              <a:srgbClr val="46698C"/>
-            </a:solidFill>
-          </a:ln>
-        </p:spPr>
-        <p:style>
-          <a:lnRef idx="2">
-            <a:schemeClr val="accent1"/>
-          </a:lnRef>
-          <a:fillRef idx="0">
-            <a:schemeClr val="accent1"/>
-          </a:fillRef>
-          <a:effectRef idx="1">
-            <a:schemeClr val="accent1"/>
-          </a:effectRef>
-          <a:fontRef idx="minor">
-            <a:schemeClr val="tx1"/>
-          </a:fontRef>
-        </p:style>
-      </p:cxnSp>
-      <p:sp>
-        <p:nvSpPr>
-          <p:cNvPr id="9" name="Rounded Rectangle 8"/>
-          <p:cNvSpPr/>
-          <p:nvPr/>
-        </p:nvSpPr>
-        <p:spPr>
-          <a:xfrm>
-            <a:off x="3429000" y="2194560"/>
-            <a:ext cx="1051560" cy="731520"/>
-          </a:xfrm>
-          <a:prstGeom prst="roundRect">
-            <a:avLst/>
-          </a:prstGeom>
-          <a:solidFill>
-            <a:srgbClr val="F8F9FB"/>
-          </a:solidFill>
-          <a:ln>
-            <a:solidFill>
-              <a:srgbClr val="B9C3CD"/>
-            </a:solidFill>
-          </a:ln>
-        </p:spPr>
-        <p:style>
-          <a:lnRef idx="1">
-            <a:schemeClr val="accent1"/>
-          </a:lnRef>
-          <a:fillRef idx="3">
-            <a:schemeClr val="accent1"/>
-          </a:fillRef>
-          <a:effectRef idx="2">
-            <a:schemeClr val="accent1"/>
-          </a:effectRef>
-          <a:fontRef idx="minor">
-            <a:schemeClr val="lt1"/>
-          </a:fontRef>
-        </p:style>
-        <p:txBody>
-          <a:bodyPr rtlCol="0" anchor="ctr"/>
-          <a:lstStyle/>
-          <a:p>
-            <a:pPr algn="ctr"/>
-            <a:r>
-              <a:rPr sz="1000" b="1">
-                <a:solidFill>
-                  <a:srgbClr val="282828"/>
-                </a:solidFill>
-                <a:latin typeface="Aptos"/>
-              </a:rPr>
-              <a:t>Dilated
-Conv d=4</a:t>
-            </a:r>
-          </a:p>
-        </p:txBody>
-      </p:sp>
-      <p:cxnSp>
-        <p:nvCxnSpPr>
-          <p:cNvPr id="10" name="Connector 9"/>
-          <p:cNvCxnSpPr/>
-          <p:nvPr/>
-        </p:nvCxnSpPr>
-        <p:spPr>
-          <a:xfrm>
-            <a:off x="4480560" y="2560320"/>
-            <a:ext cx="320040" cy="0"/>
-          </a:xfrm>
-          <a:prstGeom prst="line">
-            <a:avLst/>
-          </a:prstGeom>
-          <a:ln w="19050">
-            <a:solidFill>
-              <a:srgbClr val="46698C"/>
-            </a:solidFill>
-          </a:ln>
-        </p:spPr>
-        <p:style>
-          <a:lnRef idx="2">
-            <a:schemeClr val="accent1"/>
-          </a:lnRef>
-          <a:fillRef idx="0">
-            <a:schemeClr val="accent1"/>
-          </a:fillRef>
-          <a:effectRef idx="1">
-            <a:schemeClr val="accent1"/>
-          </a:effectRef>
-          <a:fontRef idx="minor">
-            <a:schemeClr val="tx1"/>
-          </a:fontRef>
-        </p:style>
-      </p:cxnSp>
-      <p:sp>
-        <p:nvSpPr>
-          <p:cNvPr id="11" name="Rounded Rectangle 10"/>
-          <p:cNvSpPr/>
-          <p:nvPr/>
-        </p:nvSpPr>
-        <p:spPr>
-          <a:xfrm>
-            <a:off x="4800600" y="2194560"/>
-            <a:ext cx="1051560" cy="731520"/>
-          </a:xfrm>
-          <a:prstGeom prst="roundRect">
-            <a:avLst/>
-          </a:prstGeom>
-          <a:solidFill>
-            <a:srgbClr val="F8F9FB"/>
-          </a:solidFill>
-          <a:ln>
-            <a:solidFill>
-              <a:srgbClr val="B9C3CD"/>
-            </a:solidFill>
-          </a:ln>
-        </p:spPr>
-        <p:style>
-          <a:lnRef idx="1">
-            <a:schemeClr val="accent1"/>
-          </a:lnRef>
-          <a:fillRef idx="3">
-            <a:schemeClr val="accent1"/>
-          </a:fillRef>
-          <a:effectRef idx="2">
-            <a:schemeClr val="accent1"/>
-          </a:effectRef>
-          <a:fontRef idx="minor">
-            <a:schemeClr val="lt1"/>
-          </a:fontRef>
-        </p:style>
-        <p:txBody>
-          <a:bodyPr rtlCol="0" anchor="ctr"/>
-          <a:lstStyle/>
-          <a:p>
-            <a:pPr algn="ctr"/>
-            <a:r>
-              <a:rPr sz="1000" b="1">
-                <a:solidFill>
-                  <a:srgbClr val="282828"/>
-                </a:solidFill>
-                <a:latin typeface="Aptos"/>
-              </a:rPr>
-              <a:t>Dilated
-Conv d=16</a:t>
-            </a:r>
-          </a:p>
-        </p:txBody>
-      </p:sp>
-      <p:cxnSp>
-        <p:nvCxnSpPr>
-          <p:cNvPr id="12" name="Connector 11"/>
-          <p:cNvCxnSpPr/>
-          <p:nvPr/>
-        </p:nvCxnSpPr>
-        <p:spPr>
-          <a:xfrm>
-            <a:off x="5852160" y="2560320"/>
-            <a:ext cx="320040" cy="0"/>
-          </a:xfrm>
-          <a:prstGeom prst="line">
-            <a:avLst/>
-          </a:prstGeom>
-          <a:ln w="19050">
-            <a:solidFill>
-              <a:srgbClr val="46698C"/>
-            </a:solidFill>
-          </a:ln>
-        </p:spPr>
-        <p:style>
-          <a:lnRef idx="2">
-            <a:schemeClr val="accent1"/>
-          </a:lnRef>
-          <a:fillRef idx="0">
-            <a:schemeClr val="accent1"/>
-          </a:fillRef>
-          <a:effectRef idx="1">
-            <a:schemeClr val="accent1"/>
-          </a:effectRef>
-          <a:fontRef idx="minor">
-            <a:schemeClr val="tx1"/>
-          </a:fontRef>
-        </p:style>
-      </p:cxnSp>
-      <p:sp>
-        <p:nvSpPr>
-          <p:cNvPr id="13" name="Rounded Rectangle 12"/>
-          <p:cNvSpPr/>
-          <p:nvPr/>
-        </p:nvSpPr>
-        <p:spPr>
-          <a:xfrm>
-            <a:off x="6172200" y="2194560"/>
-            <a:ext cx="1051560" cy="731520"/>
-          </a:xfrm>
-          <a:prstGeom prst="roundRect">
-            <a:avLst/>
-          </a:prstGeom>
-          <a:solidFill>
-            <a:srgbClr val="F8F9FB"/>
-          </a:solidFill>
-          <a:ln>
-            <a:solidFill>
-              <a:srgbClr val="B9C3CD"/>
-            </a:solidFill>
-          </a:ln>
-        </p:spPr>
-        <p:style>
-          <a:lnRef idx="1">
-            <a:schemeClr val="accent1"/>
-          </a:lnRef>
-          <a:fillRef idx="3">
-            <a:schemeClr val="accent1"/>
-          </a:fillRef>
-          <a:effectRef idx="2">
-            <a:schemeClr val="accent1"/>
-          </a:effectRef>
-          <a:fontRef idx="minor">
-            <a:schemeClr val="lt1"/>
-          </a:fontRef>
-        </p:style>
-        <p:txBody>
-          <a:bodyPr rtlCol="0" anchor="ctr"/>
-          <a:lstStyle/>
-          <a:p>
-            <a:pPr algn="ctr"/>
-            <a:r>
-              <a:rPr sz="1000" b="1">
-                <a:solidFill>
-                  <a:srgbClr val="282828"/>
-                </a:solidFill>
-                <a:latin typeface="Aptos"/>
-              </a:rPr>
-              <a:t>Dilated
-Conv d=64</a:t>
-            </a:r>
-          </a:p>
-        </p:txBody>
-      </p:sp>
-      <p:cxnSp>
-        <p:nvCxnSpPr>
-          <p:cNvPr id="14" name="Connector 13"/>
-          <p:cNvCxnSpPr/>
-          <p:nvPr/>
-        </p:nvCxnSpPr>
-        <p:spPr>
-          <a:xfrm>
-            <a:off x="7223760" y="2560320"/>
-            <a:ext cx="320040" cy="0"/>
-          </a:xfrm>
-          <a:prstGeom prst="line">
-            <a:avLst/>
-          </a:prstGeom>
-          <a:ln w="19050">
-            <a:solidFill>
-              <a:srgbClr val="46698C"/>
-            </a:solidFill>
-          </a:ln>
-        </p:spPr>
-        <p:style>
-          <a:lnRef idx="2">
-            <a:schemeClr val="accent1"/>
-          </a:lnRef>
-          <a:fillRef idx="0">
-            <a:schemeClr val="accent1"/>
-          </a:fillRef>
-          <a:effectRef idx="1">
-            <a:schemeClr val="accent1"/>
-          </a:effectRef>
-          <a:fontRef idx="minor">
-            <a:schemeClr val="tx1"/>
-          </a:fontRef>
-        </p:style>
-      </p:cxnSp>
-      <p:sp>
-        <p:nvSpPr>
-          <p:cNvPr id="15" name="Rounded Rectangle 14"/>
-          <p:cNvSpPr/>
-          <p:nvPr/>
-        </p:nvSpPr>
-        <p:spPr>
-          <a:xfrm>
-            <a:off x="7543800" y="2194560"/>
-            <a:ext cx="1051560" cy="731520"/>
-          </a:xfrm>
-          <a:prstGeom prst="roundRect">
-            <a:avLst/>
-          </a:prstGeom>
-          <a:solidFill>
-            <a:srgbClr val="F8F9FB"/>
-          </a:solidFill>
-          <a:ln>
-            <a:solidFill>
-              <a:srgbClr val="B9C3CD"/>
-            </a:solidFill>
-          </a:ln>
-        </p:spPr>
-        <p:style>
-          <a:lnRef idx="1">
-            <a:schemeClr val="accent1"/>
-          </a:lnRef>
-          <a:fillRef idx="3">
-            <a:schemeClr val="accent1"/>
-          </a:fillRef>
-          <a:effectRef idx="2">
-            <a:schemeClr val="accent1"/>
-          </a:effectRef>
-          <a:fontRef idx="minor">
-            <a:schemeClr val="lt1"/>
-          </a:fontRef>
-        </p:style>
-        <p:txBody>
-          <a:bodyPr rtlCol="0" anchor="ctr"/>
-          <a:lstStyle/>
-          <a:p>
-            <a:pPr algn="ctr"/>
-            <a:r>
-              <a:rPr sz="1000" b="1">
-                <a:solidFill>
-                  <a:srgbClr val="282828"/>
-                </a:solidFill>
-                <a:latin typeface="Aptos"/>
-              </a:rPr>
-              <a:t>Residual
-Add</a:t>
-            </a:r>
-          </a:p>
-        </p:txBody>
-      </p:sp>
-      <p:cxnSp>
-        <p:nvCxnSpPr>
-          <p:cNvPr id="16" name="Connector 15"/>
-          <p:cNvCxnSpPr/>
-          <p:nvPr/>
-        </p:nvCxnSpPr>
-        <p:spPr>
-          <a:xfrm>
-            <a:off x="8595360" y="2560320"/>
-            <a:ext cx="320040" cy="0"/>
-          </a:xfrm>
-          <a:prstGeom prst="line">
-            <a:avLst/>
-          </a:prstGeom>
-          <a:ln w="19050">
-            <a:solidFill>
-              <a:srgbClr val="46698C"/>
-            </a:solidFill>
-          </a:ln>
-        </p:spPr>
-        <p:style>
-          <a:lnRef idx="2">
-            <a:schemeClr val="accent1"/>
-          </a:lnRef>
-          <a:fillRef idx="0">
-            <a:schemeClr val="accent1"/>
-          </a:fillRef>
-          <a:effectRef idx="1">
-            <a:schemeClr val="accent1"/>
-          </a:effectRef>
-          <a:fontRef idx="minor">
-            <a:schemeClr val="tx1"/>
-          </a:fontRef>
-        </p:style>
-      </p:cxnSp>
-      <p:sp>
-        <p:nvSpPr>
-          <p:cNvPr id="17" name="Rounded Rectangle 16"/>
-          <p:cNvSpPr/>
-          <p:nvPr/>
-        </p:nvSpPr>
-        <p:spPr>
-          <a:xfrm>
-            <a:off x="8915400" y="2194560"/>
-            <a:ext cx="1051560" cy="731520"/>
-          </a:xfrm>
-          <a:prstGeom prst="roundRect">
-            <a:avLst/>
-          </a:prstGeom>
-          <a:solidFill>
-            <a:srgbClr val="F8F9FB"/>
-          </a:solidFill>
-          <a:ln>
-            <a:solidFill>
-              <a:srgbClr val="B9C3CD"/>
-            </a:solidFill>
-          </a:ln>
-        </p:spPr>
-        <p:style>
-          <a:lnRef idx="1">
-            <a:schemeClr val="accent1"/>
-          </a:lnRef>
-          <a:fillRef idx="3">
-            <a:schemeClr val="accent1"/>
-          </a:fillRef>
-          <a:effectRef idx="2">
-            <a:schemeClr val="accent1"/>
-          </a:effectRef>
-          <a:fontRef idx="minor">
-            <a:schemeClr val="lt1"/>
-          </a:fontRef>
-        </p:style>
-        <p:txBody>
-          <a:bodyPr rtlCol="0" anchor="ctr"/>
-          <a:lstStyle/>
-          <a:p>
-            <a:pPr algn="ctr"/>
-            <a:r>
-              <a:rPr sz="1000" b="1">
-                <a:solidFill>
-                  <a:srgbClr val="282828"/>
-                </a:solidFill>
-                <a:latin typeface="Aptos"/>
-              </a:rPr>
-              <a:t>1×1
-Fusion</a:t>
-            </a:r>
-          </a:p>
-        </p:txBody>
-      </p:sp>
-      <p:cxnSp>
-        <p:nvCxnSpPr>
-          <p:cNvPr id="18" name="Connector 17"/>
-          <p:cNvCxnSpPr/>
-          <p:nvPr/>
-        </p:nvCxnSpPr>
-        <p:spPr>
-          <a:xfrm>
-            <a:off x="9966960" y="2560320"/>
-            <a:ext cx="228600" cy="0"/>
-          </a:xfrm>
-          <a:prstGeom prst="line">
-            <a:avLst/>
-          </a:prstGeom>
-          <a:ln w="19050">
-            <a:solidFill>
-              <a:srgbClr val="46698C"/>
-            </a:solidFill>
-          </a:ln>
-        </p:spPr>
-        <p:style>
-          <a:lnRef idx="2">
-            <a:schemeClr val="accent1"/>
-          </a:lnRef>
-          <a:fillRef idx="0">
-            <a:schemeClr val="accent1"/>
-          </a:fillRef>
-          <a:effectRef idx="1">
-            <a:schemeClr val="accent1"/>
-          </a:effectRef>
-          <a:fontRef idx="minor">
-            <a:schemeClr val="tx1"/>
-          </a:fontRef>
-        </p:style>
-      </p:cxnSp>
-      <p:sp>
-        <p:nvSpPr>
-          <p:cNvPr id="19" name="Rounded Rectangle 18"/>
-          <p:cNvSpPr/>
-          <p:nvPr/>
-        </p:nvSpPr>
-        <p:spPr>
-          <a:xfrm>
-            <a:off x="10195560" y="2194560"/>
-            <a:ext cx="1051560" cy="731520"/>
-          </a:xfrm>
-          <a:prstGeom prst="roundRect">
-            <a:avLst/>
-          </a:prstGeom>
-          <a:solidFill>
-            <a:srgbClr val="F8F9FB"/>
-          </a:solidFill>
-          <a:ln>
-            <a:solidFill>
-              <a:srgbClr val="B9C3CD"/>
-            </a:solidFill>
-          </a:ln>
-        </p:spPr>
-        <p:style>
-          <a:lnRef idx="1">
-            <a:schemeClr val="accent1"/>
-          </a:lnRef>
-          <a:fillRef idx="3">
-            <a:schemeClr val="accent1"/>
-          </a:fillRef>
-          <a:effectRef idx="2">
-            <a:schemeClr val="accent1"/>
-          </a:effectRef>
-          <a:fontRef idx="minor">
-            <a:schemeClr val="lt1"/>
-          </a:fontRef>
-        </p:style>
-        <p:txBody>
-          <a:bodyPr rtlCol="0" anchor="ctr"/>
-          <a:lstStyle/>
-          <a:p>
-            <a:pPr algn="ctr"/>
-            <a:r>
-              <a:rPr sz="1000" b="1">
-                <a:solidFill>
-                  <a:srgbClr val="282828"/>
-                </a:solidFill>
-                <a:latin typeface="Aptos"/>
-              </a:rPr>
-              <a:t>Sigmoid
-Mask</a:t>
-            </a:r>
-          </a:p>
-        </p:txBody>
-      </p:sp>
-      <p:sp>
-        <p:nvSpPr>
-          <p:cNvPr id="21" name="TextBox 20"/>
-          <p:cNvSpPr txBox="1"/>
-          <p:nvPr/>
-        </p:nvSpPr>
-        <p:spPr>
-          <a:xfrm>
-            <a:off x="731520" y="3931921"/>
-            <a:ext cx="4754880" cy="1194173"/>
-          </a:xfrm>
-          <a:prstGeom prst="rect">
-            <a:avLst/>
-          </a:prstGeom>
-          <a:noFill/>
-        </p:spPr>
-        <p:txBody>
-          <a:bodyPr wrap="square" lIns="45720" tIns="27432" rIns="45720" bIns="27432">
-            <a:spAutoFit/>
-          </a:bodyPr>
-          <a:lstStyle/>
-          <a:p>
-            <a:pPr>
-              <a:spcAft>
-                <a:spcPts val="600"/>
-              </a:spcAft>
-              <a:defRPr sz="1600">
-                <a:solidFill>
-                  <a:srgbClr val="282828"/>
-                </a:solidFill>
-                <a:latin typeface="Aptos"/>
-              </a:defRPr>
-            </a:pPr>
-            <a:r>
-              <a:rPr dirty="0"/>
-              <a:t>Wide first kernel captures pulse morphology</a:t>
-            </a:r>
-          </a:p>
-          <a:p>
-            <a:pPr>
-              <a:spcAft>
-                <a:spcPts val="600"/>
-              </a:spcAft>
-              <a:defRPr sz="1600">
-                <a:solidFill>
-                  <a:srgbClr val="282828"/>
-                </a:solidFill>
-                <a:latin typeface="Aptos"/>
-              </a:defRPr>
-            </a:pPr>
-            <a:r>
-              <a:rPr dirty="0"/>
-              <a:t>Dilated convolutions capture long-range clutter context</a:t>
-            </a:r>
-          </a:p>
-          <a:p>
-            <a:pPr>
-              <a:spcAft>
-                <a:spcPts val="600"/>
-              </a:spcAft>
-              <a:defRPr sz="1600">
-                <a:solidFill>
-                  <a:srgbClr val="282828"/>
-                </a:solidFill>
-                <a:latin typeface="Aptos"/>
-              </a:defRPr>
-            </a:pPr>
-            <a:r>
-              <a:rPr dirty="0"/>
-              <a:t>Skip connection preserves local target features</a:t>
-            </a:r>
-          </a:p>
-        </p:txBody>
-      </p:sp>
       <p:pic>
         <p:nvPicPr>
-          <p:cNvPr id="23" name="Picture 22">
+          <p:cNvPr id="22" name="Picture 21">
             <a:extLst>
               <a:ext uri="{FF2B5EF4-FFF2-40B4-BE49-F238E27FC236}">
-                <a16:creationId xmlns:a16="http://schemas.microsoft.com/office/drawing/2014/main" id="{11E033DD-B4DB-3C24-773F-C4F7DBCC51CB}"/>
+                <a16:creationId xmlns:a16="http://schemas.microsoft.com/office/drawing/2014/main" id="{5FB02580-2F9C-A497-5757-E3BF21FBC105}"/>
               </a:ext>
             </a:extLst>
           </p:cNvPr>
@@ -10747,14 +10284,107 @@
         </p:blipFill>
         <p:spPr>
           <a:xfrm>
-            <a:off x="5806214" y="3846444"/>
-            <a:ext cx="5578291" cy="1432823"/>
+            <a:off x="2418375" y="1140024"/>
+            <a:ext cx="7772400" cy="3477697"/>
           </a:xfrm>
           <a:prstGeom prst="rect">
             <a:avLst/>
           </a:prstGeom>
         </p:spPr>
       </p:pic>
+      <p:sp>
+        <p:nvSpPr>
+          <p:cNvPr id="21" name="TextBox 20"/>
+          <p:cNvSpPr txBox="1"/>
+          <p:nvPr/>
+        </p:nvSpPr>
+        <p:spPr>
+          <a:xfrm>
+            <a:off x="502920" y="4617721"/>
+            <a:ext cx="4754880" cy="1517338"/>
+          </a:xfrm>
+          <a:prstGeom prst="rect">
+            <a:avLst/>
+          </a:prstGeom>
+          <a:noFill/>
+        </p:spPr>
+        <p:txBody>
+          <a:bodyPr wrap="square" lIns="45720" tIns="27432" rIns="45720" bIns="27432">
+            <a:spAutoFit/>
+          </a:bodyPr>
+          <a:lstStyle/>
+          <a:p>
+            <a:pPr>
+              <a:spcAft>
+                <a:spcPts val="600"/>
+              </a:spcAft>
+              <a:defRPr sz="1600">
+                <a:solidFill>
+                  <a:srgbClr val="282828"/>
+                </a:solidFill>
+                <a:latin typeface="Aptos"/>
+              </a:defRPr>
+            </a:pPr>
+            <a:r>
+              <a:rPr dirty="0"/>
+              <a:t>Wide first kernel captures pulse morphology</a:t>
+            </a:r>
+          </a:p>
+          <a:p>
+            <a:pPr>
+              <a:spcAft>
+                <a:spcPts val="600"/>
+              </a:spcAft>
+              <a:defRPr sz="1600">
+                <a:solidFill>
+                  <a:srgbClr val="282828"/>
+                </a:solidFill>
+                <a:latin typeface="Aptos"/>
+              </a:defRPr>
+            </a:pPr>
+            <a:r>
+              <a:rPr dirty="0"/>
+              <a:t>Dilated convolutions capture long-range clutter context</a:t>
+            </a:r>
+          </a:p>
+          <a:p>
+            <a:pPr>
+              <a:spcAft>
+                <a:spcPts val="600"/>
+              </a:spcAft>
+              <a:defRPr sz="1600">
+                <a:solidFill>
+                  <a:srgbClr val="282828"/>
+                </a:solidFill>
+                <a:latin typeface="Aptos"/>
+              </a:defRPr>
+            </a:pPr>
+            <a:r>
+              <a:rPr dirty="0"/>
+              <a:t>Skip connection preserves local target features</a:t>
+            </a:r>
+            <a:endParaRPr lang="en-US" dirty="0"/>
+          </a:p>
+          <a:p>
+            <a:pPr>
+              <a:spcAft>
+                <a:spcPts val="600"/>
+              </a:spcAft>
+              <a:defRPr sz="1600">
+                <a:solidFill>
+                  <a:srgbClr val="282828"/>
+                </a:solidFill>
+                <a:latin typeface="Aptos"/>
+              </a:defRPr>
+            </a:pPr>
+            <a:r>
+              <a:rPr lang="en-IL" dirty="0"/>
+              <a:t>40k Parameters (very small for RT inference)</a:t>
+            </a:r>
+            <a:endParaRPr dirty="0"/>
+          </a:p>
+        </p:txBody>
+      </p:sp>
     </p:spTree>
   </p:cSld>
   <p:clrMapOvr>
@@ -11081,4 +10711,319 @@
   </a:objectDefaults>
   <a:extraClrSchemeLst/>
 </a:theme>
+</file>
+
+<file path=ppt/theme/theme2.xml><?xml version="1.0" encoding="utf-8"?>
+<a:theme xmlns:a="http://schemas.openxmlformats.org/drawingml/2006/main" name="Office Theme">
+  <a:themeElements>
+    <a:clrScheme name="Office">
+      <a:dk1>
+        <a:sysClr val="windowText" lastClr="000000"/>
+      </a:dk1>
+      <a:lt1>
+        <a:sysClr val="window" lastClr="FFFFFF"/>
+      </a:lt1>
+      <a:dk2>
+        <a:srgbClr val="0E2841"/>
+      </a:dk2>
+      <a:lt2>
+        <a:srgbClr val="E8E8E8"/>
+      </a:lt2>
+      <a:accent1>
+        <a:srgbClr val="156082"/>
+      </a:accent1>
+      <a:accent2>
+        <a:srgbClr val="E97132"/>
+      </a:accent2>
+      <a:accent3>
+        <a:srgbClr val="196B24"/>
+      </a:accent3>
+      <a:accent4>
+        <a:srgbClr val="0F9ED5"/>
+      </a:accent4>
+      <a:accent5>
+        <a:srgbClr val="A02B93"/>
+      </a:accent5>
+      <a:accent6>
+        <a:srgbClr val="4EA72E"/>
+      </a:accent6>
+      <a:hlink>
+        <a:srgbClr val="467886"/>
+      </a:hlink>
+      <a:folHlink>
+        <a:srgbClr val="96607D"/>
+      </a:folHlink>
+    </a:clrScheme>
+    <a:fontScheme name="Office">
+      <a:majorFont>
+        <a:latin typeface="Aptos Display" panose="02110004020202020204"/>
+        <a:ea typeface=""/>
+        <a:cs typeface=""/>
+        <a:font script="Jpan" typeface="游ゴシック Light"/>
+        <a:font script="Hang" typeface="맑은 고딕"/>
+        <a:font script="Hans" typeface="等线 Light"/>
+        <a:font script="Hant" typeface="新細明體"/>
+        <a:font script="Arab" typeface="Times New Roman"/>
+        <a:font script="Hebr" typeface="Times New Roman"/>
+        <a:font script="Thai" typeface="Angsana New"/>
+        <a:font script="Ethi" typeface="Nyala"/>
+        <a:font script="Beng" typeface="Vrinda"/>
+        <a:font script="Gujr" typeface="Shruti"/>
+        <a:font script="Khmr" typeface="MoolBoran"/>
+        <a:font script="Knda" typeface="Tunga"/>
+        <a:font script="Guru" typeface="Raavi"/>
+        <a:font script="Cans" typeface="Euphemia"/>
+        <a:font script="Cher" typeface="Plantagenet Cherokee"/>
+        <a:font script="Yiii" typeface="Microsoft Yi Baiti"/>
+        <a:font script="Tibt" typeface="Microsoft Himalaya"/>
+        <a:font script="Thaa" typeface="MV Boli"/>
+        <a:font script="Deva" typeface="Mangal"/>
+        <a:font script="Telu" typeface="Gautami"/>
+        <a:font script="Taml" typeface="Latha"/>
+        <a:font script="Syrc" typeface="Estrangelo Edessa"/>
+        <a:font script="Orya" typeface="Kalinga"/>
+        <a:font script="Mlym" typeface="Kartika"/>
+        <a:font script="Laoo" typeface="DokChampa"/>
+        <a:font script="Sinh" typeface="Iskoola Pota"/>
+        <a:font script="Mong" typeface="Mongolian Baiti"/>
+        <a:font script="Viet" typeface="Times New Roman"/>
+        <a:font script="Uigh" typeface="Microsoft Uighur"/>
+        <a:font script="Geor" typeface="Sylfaen"/>
+        <a:font script="Armn" typeface="Arial"/>
+        <a:font script="Bugi" typeface="Leelawadee UI"/>
+        <a:font script="Bopo" typeface="Microsoft JhengHei"/>
+        <a:font script="Java" typeface="Javanese Text"/>
+        <a:font script="Lisu" typeface="Segoe UI"/>
+        <a:font script="Mymr" typeface="Myanmar Text"/>
+        <a:font script="Nkoo" typeface="Ebrima"/>
+        <a:font script="Olck" typeface="Nirmala UI"/>
+        <a:font script="Osma" typeface="Ebrima"/>
+        <a:font script="Phag" typeface="Phagspa"/>
+        <a:font script="Syrn" typeface="Estrangelo Edessa"/>
+        <a:font script="Syrj" typeface="Estrangelo Edessa"/>
+        <a:font script="Syre" typeface="Estrangelo Edessa"/>
+        <a:font script="Sora" typeface="Nirmala UI"/>
+        <a:font script="Tale" typeface="Microsoft Tai Le"/>
+        <a:font script="Talu" typeface="Microsoft New Tai Lue"/>
+        <a:font script="Tfng" typeface="Ebrima"/>
+      </a:majorFont>
+      <a:minorFont>
+        <a:latin typeface="Aptos" panose="02110004020202020204"/>
+        <a:ea typeface=""/>
+        <a:cs typeface=""/>
+        <a:font script="Jpan" typeface="游ゴシック"/>
+        <a:font script="Hang" typeface="맑은 고딕"/>
+        <a:font script="Hans" typeface="等线"/>
+        <a:font script="Hant" typeface="新細明體"/>
+        <a:font script="Arab" typeface="Arial"/>
+        <a:font script="Hebr" typeface="Arial"/>
+        <a:font script="Thai" typeface="Cordia New"/>
+        <a:font script="Ethi" typeface="Nyala"/>
+        <a:font script="Beng" typeface="Vrinda"/>
+        <a:font script="Gujr" typeface="Shruti"/>
+        <a:font script="Khmr" typeface="DaunPenh"/>
+        <a:font script="Knda" typeface="Tunga"/>
+        <a:font script="Guru" typeface="Raavi"/>
+        <a:font script="Cans" typeface="Euphemia"/>
+        <a:font script="Cher" typeface="Plantagenet Cherokee"/>
+        <a:font script="Yiii" typeface="Microsoft Yi Baiti"/>
+        <a:font script="Tibt" typeface="Microsoft Himalaya"/>
+        <a:font script="Thaa" typeface="MV Boli"/>
+        <a:font script="Deva" typeface="Mangal"/>
+        <a:font script="Telu" typeface="Gautami"/>
+        <a:font script="Taml" typeface="Latha"/>
+        <a:font script="Syrc" typeface="Estrangelo Edessa"/>
+        <a:font script="Orya" typeface="Kalinga"/>
+        <a:font script="Mlym" typeface="Kartika"/>
+        <a:font script="Laoo" typeface="DokChampa"/>
+        <a:font script="Sinh" typeface="Iskoola Pota"/>
+        <a:font script="Mong" typeface="Mongolian Baiti"/>
+        <a:font script="Viet" typeface="Arial"/>
+        <a:font script="Uigh" typeface="Microsoft Uighur"/>
+        <a:font script="Geor" typeface="Sylfaen"/>
+        <a:font script="Armn" typeface="Arial"/>
+        <a:font script="Bugi" typeface="Leelawadee UI"/>
+        <a:font script="Bopo" typeface="Microsoft JhengHei"/>
+        <a:font script="Java" typeface="Javanese Text"/>
+        <a:font script="Lisu" typeface="Segoe UI"/>
+        <a:font script="Mymr" typeface="Myanmar Text"/>
+        <a:font script="Nkoo" typeface="Ebrima"/>
+        <a:font script="Olck" typeface="Nirmala UI"/>
+        <a:font script="Osma" typeface="Ebrima"/>
+        <a:font script="Phag" typeface="Phagspa"/>
+        <a:font script="Syrn" typeface="Estrangelo Edessa"/>
+        <a:font script="Syrj" typeface="Estrangelo Edessa"/>
+        <a:font script="Syre" typeface="Estrangelo Edessa"/>
+        <a:font script="Sora" typeface="Nirmala UI"/>
+        <a:font script="Tale" typeface="Microsoft Tai Le"/>
+        <a:font script="Talu" typeface="Microsoft New Tai Lue"/>
+        <a:font script="Tfng" typeface="Ebrima"/>
+      </a:minorFont>
+    </a:fontScheme>
+    <a:fmtScheme name="Office">
+      <a:fillStyleLst>
+        <a:solidFill>
+          <a:schemeClr val="phClr"/>
+        </a:solidFill>
+        <a:gradFill rotWithShape="1">
+          <a:gsLst>
+            <a:gs pos="0">
+              <a:schemeClr val="phClr">
+                <a:lumMod val="110000"/>
+                <a:satMod val="105000"/>
+                <a:tint val="67000"/>
+              </a:schemeClr>
+            </a:gs>
+            <a:gs pos="50000">
+              <a:schemeClr val="phClr">
+                <a:lumMod val="105000"/>
+                <a:satMod val="103000"/>
+                <a:tint val="73000"/>
+              </a:schemeClr>
+            </a:gs>
+            <a:gs pos="100000">
+              <a:schemeClr val="phClr">
+                <a:lumMod val="105000"/>
+                <a:satMod val="109000"/>
+                <a:tint val="81000"/>
+              </a:schemeClr>
+            </a:gs>
+          </a:gsLst>
+          <a:lin ang="5400000" scaled="0"/>
+        </a:gradFill>
+        <a:gradFill rotWithShape="1">
+          <a:gsLst>
+            <a:gs pos="0">
+              <a:schemeClr val="phClr">
+                <a:satMod val="103000"/>
+                <a:lumMod val="102000"/>
+                <a:tint val="94000"/>
+              </a:schemeClr>
+            </a:gs>
+            <a:gs pos="50000">
+              <a:schemeClr val="phClr">
+                <a:satMod val="110000"/>
+                <a:lumMod val="100000"/>
+                <a:shade val="100000"/>
+              </a:schemeClr>
+            </a:gs>
+            <a:gs pos="100000">
+              <a:schemeClr val="phClr">
+                <a:lumMod val="99000"/>
+                <a:satMod val="120000"/>
+                <a:shade val="78000"/>
+              </a:schemeClr>
+            </a:gs>
+          </a:gsLst>
+          <a:lin ang="5400000" scaled="0"/>
+        </a:gradFill>
+      </a:fillStyleLst>
+      <a:lnStyleLst>
+        <a:ln w="12700" cap="flat" cmpd="sng" algn="ctr">
+          <a:solidFill>
+            <a:schemeClr val="phClr"/>
+          </a:solidFill>
+          <a:prstDash val="solid"/>
+          <a:miter lim="800000"/>
+        </a:ln>
+        <a:ln w="19050" cap="flat" cmpd="sng" algn="ctr">
+          <a:solidFill>
+            <a:schemeClr val="phClr"/>
+          </a:solidFill>
+          <a:prstDash val="solid"/>
+          <a:miter lim="800000"/>
+        </a:ln>
+        <a:ln w="25400" cap="flat" cmpd="sng" algn="ctr">
+          <a:solidFill>
+            <a:schemeClr val="phClr"/>
+          </a:solidFill>
+          <a:prstDash val="solid"/>
+          <a:miter lim="800000"/>
+        </a:ln>
+      </a:lnStyleLst>
+      <a:effectStyleLst>
+        <a:effectStyle>
+          <a:effectLst/>
+        </a:effectStyle>
+        <a:effectStyle>
+          <a:effectLst/>
+        </a:effectStyle>
+        <a:effectStyle>
+          <a:effectLst>
+            <a:outerShdw blurRad="57150" dist="19050" dir="5400000" algn="ctr" rotWithShape="0">
+              <a:srgbClr val="000000">
+                <a:alpha val="63000"/>
+              </a:srgbClr>
+            </a:outerShdw>
+          </a:effectLst>
+        </a:effectStyle>
+      </a:effectStyleLst>
+      <a:bgFillStyleLst>
+        <a:solidFill>
+          <a:schemeClr val="phClr"/>
+        </a:solidFill>
+        <a:solidFill>
+          <a:schemeClr val="phClr">
+            <a:tint val="95000"/>
+            <a:satMod val="170000"/>
+          </a:schemeClr>
+        </a:solidFill>
+        <a:gradFill rotWithShape="1">
+          <a:gsLst>
+            <a:gs pos="0">
+              <a:schemeClr val="phClr">
+                <a:tint val="93000"/>
+                <a:satMod val="150000"/>
+                <a:shade val="98000"/>
+                <a:lumMod val="102000"/>
+              </a:schemeClr>
+            </a:gs>
+            <a:gs pos="50000">
+              <a:schemeClr val="phClr">
+                <a:tint val="98000"/>
+                <a:satMod val="130000"/>
+                <a:shade val="90000"/>
+                <a:lumMod val="103000"/>
+              </a:schemeClr>
+            </a:gs>
+            <a:gs pos="100000">
+              <a:schemeClr val="phClr">
+                <a:shade val="63000"/>
+                <a:satMod val="120000"/>
+              </a:schemeClr>
+            </a:gs>
+          </a:gsLst>
+          <a:lin ang="5400000" scaled="0"/>
+        </a:gradFill>
+      </a:bgFillStyleLst>
+    </a:fmtScheme>
+  </a:themeElements>
+  <a:objectDefaults>
+    <a:lnDef>
+      <a:spPr/>
+      <a:bodyPr/>
+      <a:lstStyle/>
+      <a:style>
+        <a:lnRef idx="2">
+          <a:schemeClr val="accent1"/>
+        </a:lnRef>
+        <a:fillRef idx="0">
+          <a:schemeClr val="accent1"/>
+        </a:fillRef>
+        <a:effectRef idx="1">
+          <a:schemeClr val="accent1"/>
+        </a:effectRef>
+        <a:fontRef idx="minor">
+          <a:schemeClr val="tx1"/>
+        </a:fontRef>
+      </a:style>
+    </a:lnDef>
+  </a:objectDefaults>
+  <a:extraClrSchemeLst/>
+  <a:extLst>
+    <a:ext uri="{05A4C25C-085E-4340-85A3-A5531E510DB2}">
+      <thm15:themeFamily xmlns:thm15="http://schemas.microsoft.com/office/thememl/2012/main" name="Office Theme" id="{2E142A2C-CD16-42D6-873A-C26D2A0506FA}" vid="{1BDDFF52-6CD6-40A5-AB3C-68EB2F1E4D0A}"/>
+    </a:ext>
+  </a:extLst>
+</a:theme>
 </file>